--- a/Poster.pptx
+++ b/Poster.pptx
@@ -241,6 +241,11 @@
       </a:defRPr>
     </a:lvl9pPr>
   </p:defaultTextStyle>
+  <p:extLst>
+    <p:ext uri="{EFAFB233-063F-42B5-8137-9DF3F51BA10A}">
+      <p15:sldGuideLst xmlns:p15="http://schemas.microsoft.com/office/powerpoint/2012/main"/>
+    </p:ext>
+  </p:extLst>
 </p:presentation>
 </file>
 
@@ -5561,6 +5566,36 @@
           <a:chExt cx="0" cy="0"/>
         </a:xfrm>
       </p:grpSpPr>
+      <p:pic>
+        <p:nvPicPr>
+          <p:cNvPr id="8" name="Immagine 7">
+            <a:extLst>
+              <a:ext uri="{FF2B5EF4-FFF2-40B4-BE49-F238E27FC236}">
+                <a16:creationId xmlns:a16="http://schemas.microsoft.com/office/drawing/2014/main" id="{2C37EFF1-C2E2-916F-61AA-71E880926631}"/>
+              </a:ext>
+            </a:extLst>
+          </p:cNvPr>
+          <p:cNvPicPr>
+            <a:picLocks noChangeAspect="1"/>
+          </p:cNvPicPr>
+          <p:nvPr/>
+        </p:nvPicPr>
+        <p:blipFill>
+          <a:blip r:embed="rId3"/>
+          <a:stretch>
+            <a:fillRect/>
+          </a:stretch>
+        </p:blipFill>
+        <p:spPr>
+          <a:xfrm>
+            <a:off x="706627" y="22584623"/>
+            <a:ext cx="14689217" cy="10787807"/>
+          </a:xfrm>
+          <a:prstGeom prst="rect">
+            <a:avLst/>
+          </a:prstGeom>
+        </p:spPr>
+      </p:pic>
       <p:sp>
         <p:nvSpPr>
           <p:cNvPr id="55" name="Google Shape;55;p13"/>
@@ -5717,7 +5752,7 @@
         </p:nvSpPr>
         <p:spPr>
           <a:xfrm>
-            <a:off x="1005174" y="12202716"/>
+            <a:off x="1005174" y="10708025"/>
             <a:ext cx="13500000" cy="1026900"/>
           </a:xfrm>
           <a:prstGeom prst="rect">
@@ -5749,14 +5784,14 @@
               <a:buNone/>
             </a:pPr>
             <a:r>
-              <a:rPr lang="en" sz="4900" b="1">
+              <a:rPr lang="en" sz="4900" b="1" dirty="0">
                 <a:solidFill>
                   <a:srgbClr val="143264"/>
                 </a:solidFill>
               </a:rPr>
               <a:t>Related works</a:t>
             </a:r>
-            <a:endParaRPr sz="3600" b="1">
+            <a:endParaRPr sz="3600" b="1" dirty="0">
               <a:solidFill>
                 <a:srgbClr val="143264"/>
               </a:solidFill>
@@ -5772,7 +5807,7 @@
               </a:spcAft>
               <a:buNone/>
             </a:pPr>
-            <a:endParaRPr sz="4900" b="1">
+            <a:endParaRPr sz="4900" b="1" dirty="0">
               <a:solidFill>
                 <a:srgbClr val="143264"/>
               </a:solidFill>
@@ -5928,7 +5963,15 @@
               </a:rPr>
               <a:t>References</a:t>
             </a:r>
-            <a:endParaRPr sz="3400" b="1" dirty="0">
+            <a:r>
+              <a:rPr sz="3400" b="1" dirty="0">
+                <a:solidFill>
+                  <a:srgbClr val="143264"/>
+                </a:solidFill>
+              </a:rPr>
+              <a:t> </a:t>
+            </a:r>
+            <a:endParaRPr lang="it-IT" sz="3400" b="1" dirty="0">
               <a:solidFill>
                 <a:srgbClr val="143264"/>
               </a:solidFill>
@@ -5950,23 +5993,7 @@
                   <a:srgbClr val="143264"/>
                 </a:solidFill>
               </a:rPr>
-              <a:t>Add your </a:t>
-            </a:r>
-            <a:r>
-              <a:rPr lang="en" sz="2400" b="1" dirty="0">
-                <a:solidFill>
-                  <a:srgbClr val="143264"/>
-                </a:solidFill>
-              </a:rPr>
-              <a:t>three</a:t>
-            </a:r>
-            <a:r>
-              <a:rPr lang="en" sz="2400" dirty="0">
-                <a:solidFill>
-                  <a:srgbClr val="143264"/>
-                </a:solidFill>
-              </a:rPr>
-              <a:t> key references here. Use IEEE referencing style. For example, </a:t>
+              <a:t>[1]</a:t>
             </a:r>
             <a:endParaRPr sz="2400" dirty="0">
               <a:solidFill>
@@ -5990,48 +6017,8 @@
                   <a:srgbClr val="143264"/>
                 </a:solidFill>
               </a:rPr>
-              <a:t>[1] A. Vaswani, N. Shazeer, N. Parmar, J. Uszkoreit, L. Jones, A. N. Gomez, Ł. Kaiser, and I. Polosukhin, “Attention is all you need,” Advances in neural information processing systems, vol. 30, 2017.</a:t>
-            </a:r>
-            <a:endParaRPr sz="2400" dirty="0">
-              <a:solidFill>
-                <a:srgbClr val="143264"/>
-              </a:solidFill>
-            </a:endParaRPr>
-          </a:p>
-          <a:p>
-            <a:pPr marL="508000" lvl="0" indent="0" algn="l" rtl="0">
-              <a:spcBef>
-                <a:spcPts val="0"/>
-              </a:spcBef>
-              <a:spcAft>
-                <a:spcPts val="0"/>
-              </a:spcAft>
-              <a:buNone/>
-            </a:pPr>
-            <a:r>
-              <a:rPr lang="en" sz="2400" dirty="0">
-                <a:solidFill>
-                  <a:srgbClr val="143264"/>
-                </a:solidFill>
-              </a:rPr>
               <a:t>[2]</a:t>
             </a:r>
-            <a:endParaRPr sz="2400" dirty="0">
-              <a:solidFill>
-                <a:srgbClr val="143264"/>
-              </a:solidFill>
-            </a:endParaRPr>
-          </a:p>
-          <a:p>
-            <a:pPr marL="508000" lvl="0" indent="0" algn="l" rtl="0">
-              <a:spcBef>
-                <a:spcPts val="0"/>
-              </a:spcBef>
-              <a:spcAft>
-                <a:spcPts val="0"/>
-              </a:spcAft>
-              <a:buNone/>
-            </a:pPr>
             <a:endParaRPr sz="2400" dirty="0">
               <a:solidFill>
                 <a:srgbClr val="143264"/>
@@ -6089,7 +6076,7 @@
         <p:spPr>
           <a:xfrm>
             <a:off x="15632986" y="31290250"/>
-            <a:ext cx="13716567" cy="6535800"/>
+            <a:ext cx="13716567" cy="6968500"/>
           </a:xfrm>
           <a:prstGeom prst="rect">
             <a:avLst/>
@@ -6185,7 +6172,7 @@
         <p:spPr>
           <a:xfrm>
             <a:off x="930050" y="4604975"/>
-            <a:ext cx="13716600" cy="7129800"/>
+            <a:ext cx="13716600" cy="5664737"/>
           </a:xfrm>
           <a:prstGeom prst="rect">
             <a:avLst/>
@@ -6257,14 +6244,14 @@
               <a:buNone/>
             </a:pPr>
             <a:r>
-              <a:rPr lang="en" sz="4900" b="1">
+              <a:rPr lang="en" sz="4900" b="1" dirty="0">
                 <a:solidFill>
                   <a:srgbClr val="143264"/>
                 </a:solidFill>
               </a:rPr>
               <a:t>Problem definition</a:t>
             </a:r>
-            <a:endParaRPr sz="3600" b="1">
+            <a:endParaRPr sz="3600" b="1" dirty="0">
               <a:solidFill>
                 <a:srgbClr val="143264"/>
               </a:solidFill>
@@ -6374,56 +6361,6 @@
       </p:sp>
       <p:sp>
         <p:nvSpPr>
-          <p:cNvPr id="68" name="Google Shape;68;p13"/>
-          <p:cNvSpPr txBox="1"/>
-          <p:nvPr/>
-        </p:nvSpPr>
-        <p:spPr>
-          <a:xfrm>
-            <a:off x="1041949" y="33758416"/>
-            <a:ext cx="13500000" cy="1026900"/>
-          </a:xfrm>
-          <a:prstGeom prst="rect">
-            <a:avLst/>
-          </a:prstGeom>
-          <a:noFill/>
-          <a:ln>
-            <a:noFill/>
-          </a:ln>
-        </p:spPr>
-        <p:txBody>
-          <a:bodyPr spcFirstLastPara="1" wrap="square" lIns="101925" tIns="101925" rIns="101925" bIns="101925" anchor="t" anchorCtr="0">
-            <a:noAutofit/>
-          </a:bodyPr>
-          <a:lstStyle/>
-          <a:p>
-            <a:pPr marL="0" lvl="0" indent="0" algn="l" rtl="0">
-              <a:spcBef>
-                <a:spcPts val="0"/>
-              </a:spcBef>
-              <a:spcAft>
-                <a:spcPts val="0"/>
-              </a:spcAft>
-              <a:buNone/>
-            </a:pPr>
-            <a:r>
-              <a:rPr lang="en" sz="4900" b="1" dirty="0">
-                <a:solidFill>
-                  <a:srgbClr val="143264"/>
-                </a:solidFill>
-              </a:rPr>
-              <a:t>Dataset(s)</a:t>
-            </a:r>
-            <a:endParaRPr sz="3600" b="1" dirty="0">
-              <a:solidFill>
-                <a:srgbClr val="143264"/>
-              </a:solidFill>
-            </a:endParaRPr>
-          </a:p>
-        </p:txBody>
-      </p:sp>
-      <p:sp>
-        <p:nvSpPr>
           <p:cNvPr id="69" name="Google Shape;69;p13"/>
           <p:cNvSpPr txBox="1"/>
           <p:nvPr/>
@@ -6479,7 +6416,7 @@
           <p:nvPr/>
         </p:nvPicPr>
         <p:blipFill>
-          <a:blip r:embed="rId3">
+          <a:blip r:embed="rId4">
             <a:alphaModFix/>
           </a:blip>
           <a:stretch>
@@ -6508,8 +6445,8 @@
         </p:nvSpPr>
         <p:spPr>
           <a:xfrm>
-            <a:off x="1041950" y="5510525"/>
-            <a:ext cx="13463400" cy="6224400"/>
+            <a:off x="1041949" y="5657131"/>
+            <a:ext cx="13463400" cy="4338272"/>
           </a:xfrm>
           <a:prstGeom prst="rect">
             <a:avLst/>
@@ -6532,18 +6469,18 @@
               <a:buSzPts val="4000"/>
             </a:pPr>
             <a:r>
-              <a:rPr lang="en-US" sz="4000" dirty="0"/>
-              <a:t>Online memes often combine image and text to express harmful or offensive content in a highly contextual way. Instead of treating such memes as content to simply remove or censor, this project focuses on </a:t>
+              <a:rPr lang="en-GB" sz="3800" dirty="0"/>
+              <a:t>Harmful memes combine image and text to spread offensive content across both online platforms and physical spaces. Existing moderation relies on censorship such as blurring or removing content after exposure. This project proposes </a:t>
             </a:r>
             <a:r>
-              <a:rPr lang="en-US" sz="4000" b="1" dirty="0"/>
+              <a:rPr lang="en-GB" sz="3800" b="1" dirty="0"/>
               <a:t>text detoxification</a:t>
             </a:r>
             <a:r>
-              <a:rPr lang="en-US" sz="4000" dirty="0"/>
-              <a:t>: rewriting the meme text to reduce toxicity while preserving its main meaning, intent, and relation to the image. The goal is therefore not to erase the message entirely, but to produce a safer version that remains coherent with the original meme.</a:t>
+              <a:rPr lang="en-GB" sz="3800" dirty="0"/>
+              <a:t>: rewriting harmful meme text in real-time while preserving its meaning and visual coherence, enabling proactive moderation without erasure.</a:t>
             </a:r>
-            <a:endParaRPr sz="4000" dirty="0">
+            <a:endParaRPr sz="3800" dirty="0">
               <a:solidFill>
                 <a:schemeClr val="dk2"/>
               </a:solidFill>
@@ -6559,7 +6496,7 @@
         </p:nvSpPr>
         <p:spPr>
           <a:xfrm>
-            <a:off x="1023475" y="13121525"/>
+            <a:off x="1023475" y="11626834"/>
             <a:ext cx="13463400" cy="8227800"/>
           </a:xfrm>
           <a:prstGeom prst="rect">
@@ -6576,32 +6513,128 @@
           </a:bodyPr>
           <a:lstStyle/>
           <a:p>
-            <a:pPr marL="457200" lvl="0" indent="-482600" algn="l" rtl="0">
-              <a:spcBef>
-                <a:spcPts val="0"/>
-              </a:spcBef>
-              <a:spcAft>
-                <a:spcPts val="0"/>
-              </a:spcAft>
-              <a:buClr>
-                <a:schemeClr val="dk2"/>
-              </a:buClr>
-              <a:buSzPts val="4000"/>
-              <a:buChar char="●"/>
+            <a:pPr marL="571500" indent="-571500">
+              <a:buFont typeface="Wingdings" panose="05000000000000000000" pitchFamily="2" charset="2"/>
+              <a:buChar char="§"/>
             </a:pPr>
             <a:r>
-              <a:rPr lang="en" sz="4000">
-                <a:solidFill>
-                  <a:schemeClr val="dk2"/>
-                </a:solidFill>
-              </a:rPr>
-              <a:t>Discuss your key references </a:t>
+              <a:rPr lang="en-GB" sz="4000" b="1" dirty="0"/>
+              <a:t>Hateful meme detection: </a:t>
             </a:r>
-            <a:endParaRPr sz="4000">
-              <a:solidFill>
-                <a:schemeClr val="dk2"/>
-              </a:solidFill>
-            </a:endParaRPr>
+            <a:r>
+              <a:rPr lang="en-GB" sz="3400" dirty="0"/>
+              <a:t>the dominant line of work frames this as a </a:t>
+            </a:r>
+            <a:r>
+              <a:rPr lang="en-GB" sz="3400" i="1" dirty="0"/>
+              <a:t>classification problem</a:t>
+            </a:r>
+            <a:r>
+              <a:rPr lang="en-GB" sz="3400" dirty="0"/>
+              <a:t>: Kiela et al.'s Hateful Memes challenge (2020) showed that multimodal fusion models (</a:t>
+            </a:r>
+            <a:r>
+              <a:rPr lang="en-GB" sz="3400" dirty="0" err="1"/>
+              <a:t>VisualBERT</a:t>
+            </a:r>
+            <a:r>
+              <a:rPr lang="en-GB" sz="3400" dirty="0"/>
+              <a:t>, CLIP-based) clearly outperform unimodal baselines. All these approaches detect and remove, while </a:t>
+            </a:r>
+            <a:r>
+              <a:rPr lang="en-GB" sz="3400" b="1" dirty="0"/>
+              <a:t>none attempt to preserve meaning</a:t>
+            </a:r>
+            <a:r>
+              <a:rPr lang="en-GB" sz="3400" dirty="0"/>
+              <a:t>.</a:t>
+            </a:r>
+          </a:p>
+          <a:p>
+            <a:pPr marL="571500" indent="-571500">
+              <a:buFont typeface="Wingdings" panose="05000000000000000000" pitchFamily="2" charset="2"/>
+              <a:buChar char="§"/>
+            </a:pPr>
+            <a:endParaRPr lang="en-GB" sz="3600" dirty="0"/>
+          </a:p>
+          <a:p>
+            <a:pPr marL="571500" indent="-571500">
+              <a:buFont typeface="Wingdings" panose="05000000000000000000" pitchFamily="2" charset="2"/>
+              <a:buChar char="§"/>
+            </a:pPr>
+            <a:r>
+              <a:rPr lang="en-GB" sz="4000" b="1" dirty="0"/>
+              <a:t>Text detoxification / style transfer:</a:t>
+            </a:r>
+            <a:r>
+              <a:rPr lang="en-GB" sz="4000" dirty="0"/>
+              <a:t> </a:t>
+            </a:r>
+            <a:r>
+              <a:rPr lang="en-GB" sz="3400" dirty="0" err="1"/>
+              <a:t>ParaDetox</a:t>
+            </a:r>
+            <a:r>
+              <a:rPr lang="en-GB" sz="3400" dirty="0"/>
+              <a:t> (</a:t>
+            </a:r>
+            <a:r>
+              <a:rPr lang="en-GB" sz="3400" dirty="0" err="1"/>
+              <a:t>Logacheva</a:t>
+            </a:r>
+            <a:r>
+              <a:rPr lang="en-GB" sz="3400" dirty="0"/>
+              <a:t> et al., 2022) formulated toxicity as a style attribute and trained seq2seq models (BART, T5) to rewrite toxic sentences neutrally. However, </a:t>
+            </a:r>
+            <a:r>
+              <a:rPr lang="en-GB" sz="3400" b="1" dirty="0"/>
+              <a:t>it operates on plain text only, ignoring the visual context that gives meme text its meaning</a:t>
+            </a:r>
+            <a:r>
+              <a:rPr lang="en-GB" sz="3400" dirty="0"/>
+              <a:t>.</a:t>
+            </a:r>
+          </a:p>
+          <a:p>
+            <a:pPr marL="571500" indent="-571500">
+              <a:buFont typeface="Wingdings" panose="05000000000000000000" pitchFamily="2" charset="2"/>
+              <a:buChar char="q"/>
+            </a:pPr>
+            <a:endParaRPr lang="en-GB" sz="3600" dirty="0"/>
+          </a:p>
+          <a:p>
+            <a:r>
+              <a:rPr lang="en-GB" sz="3400" dirty="0"/>
+              <a:t>We fill this gap by leveraging </a:t>
+            </a:r>
+            <a:r>
+              <a:rPr lang="en-GB" sz="3400" b="1" dirty="0" err="1"/>
+              <a:t>LLaVA</a:t>
+            </a:r>
+            <a:r>
+              <a:rPr lang="en-GB" sz="3400" b="1" dirty="0"/>
+              <a:t>-Next's multimodal understanding as a teacher</a:t>
+            </a:r>
+            <a:r>
+              <a:rPr lang="en-GB" sz="3400" dirty="0"/>
+              <a:t> to distil detoxification capability into a </a:t>
+            </a:r>
+            <a:r>
+              <a:rPr lang="en-GB" sz="3400" b="1" dirty="0"/>
+              <a:t>lightweight BART-large student</a:t>
+            </a:r>
+            <a:r>
+              <a:rPr lang="en-GB" sz="3400" dirty="0"/>
+              <a:t>, enabling </a:t>
+            </a:r>
+            <a:r>
+              <a:rPr lang="en-GB" sz="3400" b="1" dirty="0"/>
+              <a:t>context-aware rewriting</a:t>
+            </a:r>
+            <a:r>
+              <a:rPr lang="en-GB" sz="3400" dirty="0"/>
+              <a:t>.</a:t>
+            </a:r>
           </a:p>
         </p:txBody>
       </p:sp>
@@ -6888,12 +6921,12 @@
               </a:buClr>
               <a:buSzPts val="4000"/>
               <a:buFont typeface="Wingdings" panose="05000000000000000000" pitchFamily="2" charset="2"/>
-              <a:buChar char="q"/>
+              <a:buChar char="§"/>
             </a:pPr>
             <a:r>
               <a:rPr lang="it-IT" sz="4000" dirty="0">
                 <a:solidFill>
-                  <a:schemeClr val="dk2"/>
+                  <a:schemeClr val="tx1"/>
                 </a:solidFill>
               </a:rPr>
               <a:t>Dataset </a:t>
@@ -6901,7 +6934,7 @@
             <a:r>
               <a:rPr lang="it-IT" sz="4000" dirty="0" err="1">
                 <a:solidFill>
-                  <a:schemeClr val="dk2"/>
+                  <a:schemeClr val="tx1"/>
                 </a:solidFill>
               </a:rPr>
               <a:t>noise</a:t>
@@ -6909,7 +6942,7 @@
             <a:r>
               <a:rPr lang="it-IT" sz="4000" dirty="0">
                 <a:solidFill>
-                  <a:schemeClr val="dk2"/>
+                  <a:schemeClr val="tx1"/>
                 </a:solidFill>
               </a:rPr>
               <a:t> and </a:t>
@@ -6917,14 +6950,14 @@
             <a:r>
               <a:rPr lang="it-IT" sz="4000" dirty="0" err="1">
                 <a:solidFill>
-                  <a:schemeClr val="dk2"/>
+                  <a:schemeClr val="tx1"/>
                 </a:solidFill>
               </a:rPr>
               <a:t>hetereogenity</a:t>
             </a:r>
             <a:endParaRPr lang="it-IT" sz="4000" dirty="0">
               <a:solidFill>
-                <a:schemeClr val="dk2"/>
+                <a:schemeClr val="tx1"/>
               </a:solidFill>
             </a:endParaRPr>
           </a:p>
@@ -6944,12 +6977,12 @@
               </a:buClr>
               <a:buSzPts val="4000"/>
               <a:buFont typeface="Wingdings" panose="05000000000000000000" pitchFamily="2" charset="2"/>
-              <a:buChar char="q"/>
+              <a:buChar char="§"/>
             </a:pPr>
             <a:r>
               <a:rPr lang="it-IT" sz="4000" dirty="0">
                 <a:solidFill>
-                  <a:schemeClr val="dk2"/>
+                  <a:schemeClr val="tx1"/>
                 </a:solidFill>
               </a:rPr>
               <a:t>Pseudo-label </a:t>
@@ -6957,14 +6990,14 @@
             <a:r>
               <a:rPr lang="it-IT" sz="4000" dirty="0" err="1">
                 <a:solidFill>
-                  <a:schemeClr val="dk2"/>
+                  <a:schemeClr val="tx1"/>
                 </a:solidFill>
               </a:rPr>
               <a:t>dependence</a:t>
             </a:r>
             <a:endParaRPr lang="it-IT" sz="4000" dirty="0">
               <a:solidFill>
-                <a:schemeClr val="dk2"/>
+                <a:schemeClr val="tx1"/>
               </a:solidFill>
             </a:endParaRPr>
           </a:p>
@@ -6984,12 +7017,12 @@
               </a:buClr>
               <a:buSzPts val="4000"/>
               <a:buFont typeface="Wingdings" panose="05000000000000000000" pitchFamily="2" charset="2"/>
-              <a:buChar char="q"/>
+              <a:buChar char="§"/>
             </a:pPr>
             <a:r>
               <a:rPr lang="it-IT" sz="4000" dirty="0">
                 <a:solidFill>
-                  <a:schemeClr val="dk2"/>
+                  <a:schemeClr val="tx1"/>
                 </a:solidFill>
               </a:rPr>
               <a:t>Limited visual grounding </a:t>
@@ -6997,7 +7030,7 @@
             <a:r>
               <a:rPr lang="it-IT" sz="4000" dirty="0" err="1">
                 <a:solidFill>
-                  <a:schemeClr val="dk2"/>
+                  <a:schemeClr val="tx1"/>
                 </a:solidFill>
               </a:rPr>
               <a:t>at</a:t>
@@ -7005,7 +7038,7 @@
             <a:r>
               <a:rPr lang="it-IT" sz="4000" dirty="0">
                 <a:solidFill>
-                  <a:schemeClr val="dk2"/>
+                  <a:schemeClr val="tx1"/>
                 </a:solidFill>
               </a:rPr>
               <a:t> </a:t>
@@ -7013,14 +7046,14 @@
             <a:r>
               <a:rPr lang="it-IT" sz="4000" dirty="0" err="1">
                 <a:solidFill>
-                  <a:schemeClr val="dk2"/>
+                  <a:schemeClr val="tx1"/>
                 </a:solidFill>
               </a:rPr>
               <a:t>inference</a:t>
             </a:r>
             <a:endParaRPr lang="it-IT" sz="4000" dirty="0">
               <a:solidFill>
-                <a:schemeClr val="dk2"/>
+                <a:schemeClr val="tx1"/>
               </a:solidFill>
             </a:endParaRPr>
           </a:p>
@@ -7040,12 +7073,12 @@
               </a:buClr>
               <a:buSzPts val="4000"/>
               <a:buFont typeface="Wingdings" panose="05000000000000000000" pitchFamily="2" charset="2"/>
-              <a:buChar char="q"/>
+              <a:buChar char="§"/>
             </a:pPr>
             <a:r>
               <a:rPr lang="it-IT" sz="4000" dirty="0" err="1">
                 <a:solidFill>
-                  <a:schemeClr val="dk2"/>
+                  <a:schemeClr val="tx1"/>
                 </a:solidFill>
               </a:rPr>
               <a:t>Partially</a:t>
@@ -7053,7 +7086,7 @@
             <a:r>
               <a:rPr lang="it-IT" sz="4000" dirty="0">
                 <a:solidFill>
-                  <a:schemeClr val="dk2"/>
+                  <a:schemeClr val="tx1"/>
                 </a:solidFill>
               </a:rPr>
               <a:t> </a:t>
@@ -7061,7 +7094,7 @@
             <a:r>
               <a:rPr lang="it-IT" sz="4000" dirty="0" err="1">
                 <a:solidFill>
-                  <a:schemeClr val="dk2"/>
+                  <a:schemeClr val="tx1"/>
                 </a:solidFill>
               </a:rPr>
               <a:t>multimodal</a:t>
@@ -7069,7 +7102,7 @@
             <a:r>
               <a:rPr lang="it-IT" sz="4000" dirty="0">
                 <a:solidFill>
-                  <a:schemeClr val="dk2"/>
+                  <a:schemeClr val="tx1"/>
                 </a:solidFill>
               </a:rPr>
               <a:t> </a:t>
@@ -7077,14 +7110,14 @@
             <a:r>
               <a:rPr lang="it-IT" sz="4000" dirty="0" err="1">
                 <a:solidFill>
-                  <a:schemeClr val="dk2"/>
+                  <a:schemeClr val="tx1"/>
                 </a:solidFill>
               </a:rPr>
               <a:t>evaluation</a:t>
             </a:r>
             <a:endParaRPr lang="it-IT" sz="4000" dirty="0">
               <a:solidFill>
-                <a:schemeClr val="dk2"/>
+                <a:schemeClr val="tx1"/>
               </a:solidFill>
             </a:endParaRPr>
           </a:p>
@@ -7104,12 +7137,12 @@
               </a:buClr>
               <a:buSzPts val="4000"/>
               <a:buFont typeface="Wingdings" panose="05000000000000000000" pitchFamily="2" charset="2"/>
-              <a:buChar char="q"/>
+              <a:buChar char="§"/>
             </a:pPr>
             <a:r>
               <a:rPr lang="it-IT" sz="4000" dirty="0" err="1">
                 <a:solidFill>
-                  <a:schemeClr val="dk2"/>
+                  <a:schemeClr val="tx1"/>
                 </a:solidFill>
               </a:rPr>
               <a:t>Unbalanced</a:t>
@@ -7117,7 +7150,7 @@
             <a:r>
               <a:rPr lang="it-IT" sz="4000" dirty="0">
                 <a:solidFill>
-                  <a:schemeClr val="dk2"/>
+                  <a:schemeClr val="tx1"/>
                 </a:solidFill>
               </a:rPr>
               <a:t> </a:t>
@@ -7125,7 +7158,7 @@
             <a:r>
               <a:rPr lang="it-IT" sz="4000" dirty="0" err="1">
                 <a:solidFill>
-                  <a:schemeClr val="dk2"/>
+                  <a:schemeClr val="tx1"/>
                 </a:solidFill>
               </a:rPr>
               <a:t>toxicity-similarity</a:t>
@@ -7133,14 +7166,14 @@
             <a:r>
               <a:rPr lang="it-IT" sz="4000" dirty="0">
                 <a:solidFill>
-                  <a:schemeClr val="dk2"/>
+                  <a:schemeClr val="tx1"/>
                 </a:solidFill>
               </a:rPr>
               <a:t> trade-off in proxy model</a:t>
             </a:r>
             <a:endParaRPr sz="4000" dirty="0">
               <a:solidFill>
-                <a:schemeClr val="dk2"/>
+                <a:schemeClr val="tx1"/>
               </a:solidFill>
             </a:endParaRPr>
           </a:p>
@@ -7154,7 +7187,7 @@
         </p:nvSpPr>
         <p:spPr>
           <a:xfrm>
-            <a:off x="15770224" y="32115047"/>
+            <a:off x="15770224" y="32303732"/>
             <a:ext cx="13409900" cy="6199925"/>
           </a:xfrm>
           <a:prstGeom prst="rect">
@@ -7178,20 +7211,16 @@
               <a:buSzPts val="4000"/>
             </a:pPr>
             <a:r>
-              <a:rPr lang="en-US" sz="3850" dirty="0"/>
-              <a:t>This project shows that meme text detoxification can be framed as a rewriting task rather than simple content removal. By distilling multimodal supervision from </a:t>
+              <a:rPr lang="en-GB" sz="4000" dirty="0"/>
+              <a:t>This project shows that by distilling multimodal supervision from </a:t>
             </a:r>
             <a:r>
-              <a:rPr lang="en-US" sz="3850" dirty="0" err="1"/>
+              <a:rPr lang="en-GB" sz="4000" dirty="0" err="1"/>
               <a:t>LLaVA</a:t>
             </a:r>
             <a:r>
-              <a:rPr lang="en-US" sz="3850" dirty="0"/>
-              <a:t>-Next into a smaller BART-large student, the system achieves strong toxicity reduction while keeping the rewritten text reasonably aligned with the original meme. Future work should improve dataset quality, strengthen direct multimodal grounding at inference time, and refine the proxy model to better balance detoxification with semantic preservation</a:t>
-            </a:r>
-            <a:r>
-              <a:rPr lang="en-US" sz="3800" dirty="0"/>
-              <a:t>.</a:t>
+              <a:rPr lang="en-GB" sz="4000" dirty="0"/>
+              <a:t>-Next into a lightweight BART-large student, the system achieves strong toxicity reduction while preserving semantic alignment with the original meme. Future work should improve dataset quality, strengthen multimodal grounding, and explore integration with OCR and inpainting modules to enable live rewriting of harmful text in video streams, making proactive moderation feasible in real-world physical environments.</a:t>
             </a:r>
             <a:endParaRPr sz="3800" dirty="0">
               <a:solidFill>
@@ -7208,7 +7237,7 @@
           <p:nvPr/>
         </p:nvPicPr>
         <p:blipFill>
-          <a:blip r:embed="rId4">
+          <a:blip r:embed="rId5">
             <a:alphaModFix/>
           </a:blip>
           <a:stretch>
@@ -7229,262 +7258,189 @@
           </a:ln>
         </p:spPr>
       </p:pic>
-      <p:pic>
-        <p:nvPicPr>
-          <p:cNvPr id="8" name="Immagine 7">
+      <p:grpSp>
+        <p:nvGrpSpPr>
+          <p:cNvPr id="2" name="Gruppo 1">
             <a:extLst>
               <a:ext uri="{FF2B5EF4-FFF2-40B4-BE49-F238E27FC236}">
-                <a16:creationId xmlns:a16="http://schemas.microsoft.com/office/drawing/2014/main" id="{2C37EFF1-C2E2-916F-61AA-71E880926631}"/>
+                <a16:creationId xmlns:a16="http://schemas.microsoft.com/office/drawing/2014/main" id="{EC9A2F4B-E3FD-4B0D-0F43-4DE43CBBE82B}"/>
               </a:ext>
             </a:extLst>
           </p:cNvPr>
-          <p:cNvPicPr>
-            <a:picLocks noChangeAspect="1"/>
-          </p:cNvPicPr>
+          <p:cNvGrpSpPr/>
           <p:nvPr/>
-        </p:nvPicPr>
-        <p:blipFill>
-          <a:blip r:embed="rId5"/>
-          <a:stretch>
-            <a:fillRect/>
-          </a:stretch>
-        </p:blipFill>
-        <p:spPr>
+        </p:nvGrpSpPr>
+        <p:grpSpPr>
           <a:xfrm>
-            <a:off x="706627" y="22584623"/>
-            <a:ext cx="14689217" cy="10787807"/>
+            <a:off x="925660" y="33616969"/>
+            <a:ext cx="14228134" cy="7247716"/>
+            <a:chOff x="925660" y="33758416"/>
+            <a:chExt cx="14228134" cy="7247716"/>
           </a:xfrm>
-          <a:prstGeom prst="rect">
-            <a:avLst/>
-          </a:prstGeom>
-        </p:spPr>
-      </p:pic>
-      <p:sp>
-        <p:nvSpPr>
-          <p:cNvPr id="10" name="CasellaDiTesto 9">
-            <a:extLst>
-              <a:ext uri="{FF2B5EF4-FFF2-40B4-BE49-F238E27FC236}">
-                <a16:creationId xmlns:a16="http://schemas.microsoft.com/office/drawing/2014/main" id="{1F336441-658D-770A-5E11-B0EF3A97494B}"/>
-              </a:ext>
-            </a:extLst>
-          </p:cNvPr>
-          <p:cNvSpPr txBox="1"/>
-          <p:nvPr/>
-        </p:nvSpPr>
-        <p:spPr>
-          <a:xfrm>
-            <a:off x="925660" y="34231658"/>
-            <a:ext cx="22848740" cy="6924973"/>
-          </a:xfrm>
-          <a:prstGeom prst="rect">
-            <a:avLst/>
-          </a:prstGeom>
-          <a:noFill/>
-        </p:spPr>
-        <p:txBody>
-          <a:bodyPr wrap="square" rtlCol="0">
-            <a:spAutoFit/>
-          </a:bodyPr>
-          <a:lstStyle/>
-          <a:p>
-            <a:pPr marL="571500" indent="-571500">
-              <a:buClr>
-                <a:schemeClr val="accent1">
-                  <a:lumMod val="50000"/>
-                </a:schemeClr>
-              </a:buClr>
-              <a:buFont typeface="Wingdings" panose="05000000000000000000" pitchFamily="2" charset="2"/>
-              <a:buChar char="q"/>
-            </a:pPr>
-            <a:endParaRPr lang="it-IT" sz="4000" dirty="0"/>
-          </a:p>
-          <a:p>
-            <a:pPr marL="571500" indent="-571500">
-              <a:buClr>
-                <a:schemeClr val="accent1">
-                  <a:lumMod val="50000"/>
-                </a:schemeClr>
-              </a:buClr>
-              <a:buFont typeface="Wingdings" panose="05000000000000000000" pitchFamily="2" charset="2"/>
-              <a:buChar char="q"/>
-            </a:pPr>
-            <a:r>
-              <a:rPr lang="it-IT" sz="4000" b="1" dirty="0" err="1"/>
-              <a:t>HarMeme</a:t>
-            </a:r>
-            <a:endParaRPr lang="it-IT" sz="4000" b="1" dirty="0"/>
-          </a:p>
-          <a:p>
-            <a:pPr>
-              <a:buClr>
-                <a:schemeClr val="accent1">
-                  <a:lumMod val="50000"/>
-                </a:schemeClr>
-              </a:buClr>
-            </a:pPr>
-            <a:r>
-              <a:rPr lang="it-IT" sz="4000" dirty="0"/>
-              <a:t>    </a:t>
-            </a:r>
-            <a:r>
-              <a:rPr lang="it-IT" sz="4000" dirty="0" err="1"/>
-              <a:t>Curated</a:t>
-            </a:r>
-            <a:r>
-              <a:rPr lang="it-IT" sz="4000" dirty="0"/>
-              <a:t> COVID-19 </a:t>
-            </a:r>
-            <a:r>
-              <a:rPr lang="it-IT" sz="4000" dirty="0" err="1"/>
-              <a:t>hateful</a:t>
-            </a:r>
-            <a:r>
-              <a:rPr lang="it-IT" sz="4000" dirty="0"/>
-              <a:t> </a:t>
-            </a:r>
-            <a:r>
-              <a:rPr lang="it-IT" sz="4000" dirty="0" err="1"/>
-              <a:t>memes</a:t>
-            </a:r>
-            <a:r>
-              <a:rPr lang="it-IT" sz="4000" dirty="0"/>
-              <a:t>.</a:t>
-            </a:r>
-          </a:p>
-          <a:p>
-            <a:pPr marL="571500" indent="-571500">
-              <a:buClr>
-                <a:schemeClr val="accent1">
-                  <a:lumMod val="50000"/>
-                </a:schemeClr>
-              </a:buClr>
-              <a:buFont typeface="Wingdings" panose="05000000000000000000" pitchFamily="2" charset="2"/>
-              <a:buChar char="q"/>
-            </a:pPr>
-            <a:endParaRPr lang="it-IT" sz="4000" dirty="0"/>
-          </a:p>
-          <a:p>
-            <a:pPr marL="571500" indent="-571500">
-              <a:buClr>
-                <a:schemeClr val="accent1">
-                  <a:lumMod val="50000"/>
-                </a:schemeClr>
-              </a:buClr>
-              <a:buFont typeface="Wingdings" panose="05000000000000000000" pitchFamily="2" charset="2"/>
-              <a:buChar char="q"/>
-            </a:pPr>
-            <a:r>
-              <a:rPr lang="it-IT" sz="4000" b="1" dirty="0"/>
-              <a:t>MAMI </a:t>
-            </a:r>
-          </a:p>
-          <a:p>
-            <a:pPr>
-              <a:buClr>
-                <a:schemeClr val="accent1">
-                  <a:lumMod val="50000"/>
-                </a:schemeClr>
-              </a:buClr>
-            </a:pPr>
-            <a:r>
-              <a:rPr lang="it-IT" sz="4000" dirty="0"/>
-              <a:t>    </a:t>
-            </a:r>
-            <a:r>
-              <a:rPr lang="it-IT" sz="4000" dirty="0" err="1"/>
-              <a:t>Misogynous</a:t>
-            </a:r>
-            <a:r>
-              <a:rPr lang="it-IT" sz="4000" dirty="0"/>
-              <a:t> </a:t>
-            </a:r>
-            <a:r>
-              <a:rPr lang="it-IT" sz="4000" dirty="0" err="1"/>
-              <a:t>memes</a:t>
-            </a:r>
-            <a:r>
-              <a:rPr lang="it-IT" sz="4000" dirty="0"/>
-              <a:t> with image–text interactions.</a:t>
-            </a:r>
-          </a:p>
-          <a:p>
-            <a:pPr marL="571500" indent="-571500">
-              <a:buClr>
-                <a:schemeClr val="accent1">
-                  <a:lumMod val="50000"/>
-                </a:schemeClr>
-              </a:buClr>
-              <a:buFont typeface="Wingdings" panose="05000000000000000000" pitchFamily="2" charset="2"/>
-              <a:buChar char="q"/>
-            </a:pPr>
-            <a:endParaRPr lang="it-IT" sz="4000" dirty="0"/>
-          </a:p>
-          <a:p>
-            <a:pPr marL="571500" indent="-571500">
-              <a:buClr>
-                <a:schemeClr val="accent1">
-                  <a:lumMod val="50000"/>
-                </a:schemeClr>
-              </a:buClr>
-              <a:buFont typeface="Wingdings" panose="05000000000000000000" pitchFamily="2" charset="2"/>
-              <a:buChar char="q"/>
-            </a:pPr>
-            <a:r>
-              <a:rPr lang="it-IT" sz="4000" b="1" dirty="0"/>
-              <a:t>MMHS150K</a:t>
-            </a:r>
-          </a:p>
-          <a:p>
-            <a:pPr>
-              <a:buClr>
-                <a:schemeClr val="accent1">
-                  <a:lumMod val="50000"/>
-                </a:schemeClr>
-              </a:buClr>
-            </a:pPr>
-            <a:r>
-              <a:rPr lang="it-IT" sz="4000" dirty="0"/>
-              <a:t>    Large-scale Twitter hate-speech images, </a:t>
-            </a:r>
-          </a:p>
-          <a:p>
-            <a:pPr>
-              <a:buClr>
-                <a:schemeClr val="accent1">
-                  <a:lumMod val="50000"/>
-                </a:schemeClr>
-              </a:buClr>
-            </a:pPr>
-            <a:r>
-              <a:rPr lang="it-IT" sz="4000" dirty="0"/>
-              <a:t>    </a:t>
-            </a:r>
-            <a:r>
-              <a:rPr lang="it-IT" sz="4000" dirty="0" err="1"/>
-              <a:t>filtered</a:t>
-            </a:r>
-            <a:r>
-              <a:rPr lang="it-IT" sz="4000" dirty="0"/>
-              <a:t> to </a:t>
-            </a:r>
-            <a:r>
-              <a:rPr lang="it-IT" sz="4000" dirty="0" err="1"/>
-              <a:t>retain</a:t>
-            </a:r>
-            <a:r>
-              <a:rPr lang="it-IT" sz="4000" dirty="0"/>
-              <a:t> meme-like samples</a:t>
-            </a:r>
-            <a:r>
-              <a:rPr lang="it-IT" sz="3200" dirty="0"/>
-              <a:t>.</a:t>
-            </a:r>
-          </a:p>
-          <a:p>
-            <a:endParaRPr lang="it-IT" sz="4400" dirty="0"/>
-          </a:p>
-        </p:txBody>
-      </p:sp>
+        </p:grpSpPr>
+        <p:sp>
+          <p:nvSpPr>
+            <p:cNvPr id="68" name="Google Shape;68;p13"/>
+            <p:cNvSpPr txBox="1"/>
+            <p:nvPr/>
+          </p:nvSpPr>
+          <p:spPr>
+            <a:xfrm>
+              <a:off x="1041949" y="33758416"/>
+              <a:ext cx="13500000" cy="1026900"/>
+            </a:xfrm>
+            <a:prstGeom prst="rect">
+              <a:avLst/>
+            </a:prstGeom>
+            <a:noFill/>
+            <a:ln>
+              <a:noFill/>
+            </a:ln>
+          </p:spPr>
+          <p:txBody>
+            <a:bodyPr spcFirstLastPara="1" wrap="square" lIns="101925" tIns="101925" rIns="101925" bIns="101925" anchor="t" anchorCtr="0">
+              <a:noAutofit/>
+            </a:bodyPr>
+            <a:lstStyle/>
+            <a:p>
+              <a:pPr marL="0" lvl="0" indent="0" algn="l" rtl="0">
+                <a:spcBef>
+                  <a:spcPts val="0"/>
+                </a:spcBef>
+                <a:spcAft>
+                  <a:spcPts val="0"/>
+                </a:spcAft>
+                <a:buNone/>
+              </a:pPr>
+              <a:r>
+                <a:rPr lang="en" sz="4900" b="1" dirty="0">
+                  <a:solidFill>
+                    <a:srgbClr val="143264"/>
+                  </a:solidFill>
+                </a:rPr>
+                <a:t>Datasets</a:t>
+              </a:r>
+              <a:endParaRPr sz="3600" b="1" dirty="0">
+                <a:solidFill>
+                  <a:srgbClr val="143264"/>
+                </a:solidFill>
+              </a:endParaRPr>
+            </a:p>
+          </p:txBody>
+        </p:sp>
+        <p:sp>
+          <p:nvSpPr>
+            <p:cNvPr id="10" name="CasellaDiTesto 9">
+              <a:extLst>
+                <a:ext uri="{FF2B5EF4-FFF2-40B4-BE49-F238E27FC236}">
+                  <a16:creationId xmlns:a16="http://schemas.microsoft.com/office/drawing/2014/main" id="{1F336441-658D-770A-5E11-B0EF3A97494B}"/>
+                </a:ext>
+              </a:extLst>
+            </p:cNvPr>
+            <p:cNvSpPr txBox="1"/>
+            <p:nvPr/>
+          </p:nvSpPr>
+          <p:spPr>
+            <a:xfrm>
+              <a:off x="925660" y="34758268"/>
+              <a:ext cx="14228134" cy="6247864"/>
+            </a:xfrm>
+            <a:prstGeom prst="rect">
+              <a:avLst/>
+            </a:prstGeom>
+            <a:noFill/>
+          </p:spPr>
+          <p:txBody>
+            <a:bodyPr wrap="square" rtlCol="0">
+              <a:spAutoFit/>
+            </a:bodyPr>
+            <a:lstStyle/>
+            <a:p>
+              <a:pPr marL="571500" indent="-571500">
+                <a:buFont typeface="Arial" panose="020B0604020202020204" pitchFamily="34" charset="0"/>
+                <a:buChar char="•"/>
+              </a:pPr>
+              <a:r>
+                <a:rPr lang="en-GB" sz="4000" b="1" dirty="0" err="1"/>
+                <a:t>HarMeme</a:t>
+              </a:r>
+              <a:r>
+                <a:rPr lang="en-GB" sz="4000" b="1" dirty="0"/>
+                <a:t>: </a:t>
+              </a:r>
+              <a:r>
+                <a:rPr lang="en-GB" sz="4000" dirty="0"/>
+                <a:t>~3500 memes related to COVID-19 and US politics, manually labelled as harmful/not-harmful with associated textual claims.</a:t>
+              </a:r>
+            </a:p>
+            <a:p>
+              <a:pPr marL="571500" indent="-571500">
+                <a:buFont typeface="Arial" panose="020B0604020202020204" pitchFamily="34" charset="0"/>
+                <a:buChar char="•"/>
+              </a:pPr>
+              <a:r>
+                <a:rPr lang="en-GB" sz="4000" b="1" dirty="0"/>
+                <a:t>MAMI: </a:t>
+              </a:r>
+              <a:r>
+                <a:rPr lang="en-GB" sz="4000" dirty="0"/>
+                <a:t>10000 misogynist memes from Twitter.</a:t>
+              </a:r>
+            </a:p>
+            <a:p>
+              <a:pPr marL="571500" indent="-571500">
+                <a:buFont typeface="Arial" panose="020B0604020202020204" pitchFamily="34" charset="0"/>
+                <a:buChar char="•"/>
+              </a:pPr>
+              <a:r>
+                <a:rPr lang="en-GB" sz="4000" b="1" dirty="0"/>
+                <a:t>MMHS150K: </a:t>
+              </a:r>
+              <a:r>
+                <a:rPr lang="en-GB" sz="4000" dirty="0"/>
+                <a:t>~150000 highly heterogeneous and noisy Twitter image-text.</a:t>
+              </a:r>
+            </a:p>
+            <a:p>
+              <a:pPr marL="571500" indent="-571500">
+                <a:buFont typeface="Arial" panose="020B0604020202020204" pitchFamily="34" charset="0"/>
+                <a:buChar char="•"/>
+              </a:pPr>
+              <a:endParaRPr lang="en-GB" sz="4000" dirty="0"/>
+            </a:p>
+            <a:p>
+              <a:r>
+                <a:rPr lang="en-GB" sz="4000" dirty="0"/>
+                <a:t>All </a:t>
+              </a:r>
+              <a:r>
+                <a:rPr lang="en-GB" sz="4000" b="1" dirty="0"/>
+                <a:t>filtered</a:t>
+              </a:r>
+              <a:r>
+                <a:rPr lang="en-GB" sz="4000" dirty="0"/>
+                <a:t> to retain </a:t>
+              </a:r>
+              <a:r>
+                <a:rPr lang="en-GB" sz="4000" b="1" dirty="0"/>
+                <a:t>meme-like images</a:t>
+              </a:r>
+              <a:r>
+                <a:rPr lang="en-GB" sz="4000" dirty="0"/>
+                <a:t> only. Combining them gives the model exposure to diverse toxicity types and noise levels, </a:t>
+              </a:r>
+              <a:r>
+                <a:rPr lang="en-GB" sz="4000" i="1" dirty="0"/>
+                <a:t>improving generalisation</a:t>
+              </a:r>
+              <a:r>
+                <a:rPr lang="en-GB" sz="4000" dirty="0"/>
+                <a:t>.</a:t>
+              </a:r>
+            </a:p>
+          </p:txBody>
+        </p:sp>
+      </p:grpSp>
       <p:pic>
         <p:nvPicPr>
           <p:cNvPr id="12" name="Immagine 11">

--- a/Poster.pptx
+++ b/Poster.pptx
@@ -6646,8 +6646,8 @@
         </p:nvSpPr>
         <p:spPr>
           <a:xfrm>
-            <a:off x="15759575" y="5662925"/>
-            <a:ext cx="13463400" cy="18714600"/>
+            <a:off x="15759575" y="17647920"/>
+            <a:ext cx="13463400" cy="6949440"/>
           </a:xfrm>
           <a:prstGeom prst="rect">
             <a:avLst/>
@@ -6663,221 +6663,82 @@
           </a:bodyPr>
           <a:lstStyle/>
           <a:p>
-            <a:pPr lvl="0" algn="l" rtl="0">
-              <a:spcBef>
-                <a:spcPts val="0"/>
-              </a:spcBef>
-              <a:spcAft>
-                <a:spcPts val="0"/>
-              </a:spcAft>
-              <a:buClr>
-                <a:schemeClr val="dk2"/>
-              </a:buClr>
-              <a:buSzPts val="4000"/>
-            </a:pPr>
-            <a:endParaRPr lang="it-IT" sz="4000" dirty="0">
-              <a:solidFill>
-                <a:schemeClr val="dk2"/>
-              </a:solidFill>
-            </a:endParaRPr>
+            <a:r>
+              <a:rPr sz="3400" b="1" i="0"/>
+              <a:t>Quantitative results on test set (n = 280):</a:t>
+            </a:r>
           </a:p>
           <a:p>
-            <a:pPr lvl="0" algn="l" rtl="0">
-              <a:spcBef>
-                <a:spcPts val="0"/>
-              </a:spcBef>
-              <a:spcAft>
-                <a:spcPts val="0"/>
-              </a:spcAft>
-              <a:buClr>
-                <a:schemeClr val="dk2"/>
-              </a:buClr>
-              <a:buSzPts val="4000"/>
-            </a:pPr>
-            <a:endParaRPr lang="it-IT" sz="4000" dirty="0">
-              <a:solidFill>
-                <a:schemeClr val="dk2"/>
-              </a:solidFill>
-            </a:endParaRPr>
+            <a:r>
+              <a:rPr sz="2800" b="0" i="1"/>
+              <a:t>STA: % non-toxic (RoBERTa) ↑  |  SIM: BERTScore ↑  |  CLIP: image-text cosine ↑</a:t>
+            </a:r>
           </a:p>
           <a:p>
-            <a:pPr lvl="0" algn="l" rtl="0">
-              <a:spcBef>
-                <a:spcPts val="0"/>
-              </a:spcBef>
-              <a:spcAft>
-                <a:spcPts val="0"/>
-              </a:spcAft>
-              <a:buClr>
-                <a:schemeClr val="dk2"/>
-              </a:buClr>
-              <a:buSzPts val="4000"/>
-            </a:pPr>
-            <a:endParaRPr lang="it-IT" sz="4000" dirty="0">
-              <a:solidFill>
-                <a:schemeClr val="dk2"/>
-              </a:solidFill>
-            </a:endParaRPr>
+            <a:r>
+              <a:rPr sz="1600" b="0" i="0"/>
+              <a:t/>
+            </a:r>
           </a:p>
           <a:p>
-            <a:pPr lvl="0" algn="l" rtl="0">
-              <a:spcBef>
-                <a:spcPts val="0"/>
-              </a:spcBef>
-              <a:spcAft>
-                <a:spcPts val="0"/>
-              </a:spcAft>
-              <a:buClr>
-                <a:schemeClr val="dk2"/>
-              </a:buClr>
-              <a:buSzPts val="4000"/>
-            </a:pPr>
-            <a:endParaRPr lang="it-IT" sz="4000" dirty="0">
-              <a:solidFill>
-                <a:schemeClr val="dk2"/>
-              </a:solidFill>
-            </a:endParaRPr>
+            <a:r>
+              <a:rPr sz="3100" b="1" i="0"/>
+              <a:t>System                                STA      SIM     CLIP</a:t>
+            </a:r>
           </a:p>
           <a:p>
-            <a:pPr lvl="0" algn="l" rtl="0">
-              <a:spcBef>
-                <a:spcPts val="0"/>
-              </a:spcBef>
-              <a:spcAft>
-                <a:spcPts val="0"/>
-              </a:spcAft>
-              <a:buClr>
-                <a:schemeClr val="dk2"/>
-              </a:buClr>
-              <a:buSzPts val="4000"/>
-            </a:pPr>
-            <a:endParaRPr lang="it-IT" sz="4000" dirty="0">
-              <a:solidFill>
-                <a:schemeClr val="dk2"/>
-              </a:solidFill>
-            </a:endParaRPr>
+            <a:r>
+              <a:rPr sz="2600" b="0" i="0"/>
+              <a:t>────────────────────────────────────────────────────────────</a:t>
+            </a:r>
           </a:p>
           <a:p>
-            <a:pPr lvl="0" algn="l" rtl="0">
-              <a:spcBef>
-                <a:spcPts val="0"/>
-              </a:spcBef>
-              <a:spcAft>
-                <a:spcPts val="0"/>
-              </a:spcAft>
-              <a:buClr>
-                <a:schemeClr val="dk2"/>
-              </a:buClr>
-              <a:buSzPts val="4000"/>
-            </a:pPr>
-            <a:endParaRPr lang="it-IT" sz="4000" dirty="0">
-              <a:solidFill>
-                <a:schemeClr val="dk2"/>
-              </a:solidFill>
-            </a:endParaRPr>
+            <a:r>
+              <a:rPr sz="3000" b="0" i="0"/>
+              <a:t>LLaVA-Next teacher (upper bound)    0.990   +0.472    0.636</a:t>
+            </a:r>
           </a:p>
           <a:p>
-            <a:pPr lvl="0" algn="l" rtl="0">
-              <a:spcBef>
-                <a:spcPts val="0"/>
-              </a:spcBef>
-              <a:spcAft>
-                <a:spcPts val="0"/>
-              </a:spcAft>
-              <a:buClr>
-                <a:schemeClr val="dk2"/>
-              </a:buClr>
-              <a:buSzPts val="4000"/>
-            </a:pPr>
-            <a:endParaRPr lang="it-IT" sz="4000" dirty="0">
-              <a:solidFill>
-                <a:schemeClr val="dk2"/>
-              </a:solidFill>
-            </a:endParaRPr>
+            <a:r>
+              <a:rPr sz="3000" b="0" i="0"/>
+              <a:t>BART base (no fine-tuning)          0.973   -0.061    0.622</a:t>
+            </a:r>
           </a:p>
           <a:p>
-            <a:pPr lvl="0" algn="l" rtl="0">
-              <a:spcBef>
-                <a:spcPts val="0"/>
-              </a:spcBef>
-              <a:spcAft>
-                <a:spcPts val="0"/>
-              </a:spcAft>
-              <a:buClr>
-                <a:schemeClr val="dk2"/>
-              </a:buClr>
-              <a:buSzPts val="4000"/>
-            </a:pPr>
-            <a:endParaRPr lang="it-IT" sz="4000" dirty="0">
-              <a:solidFill>
-                <a:schemeClr val="dk2"/>
-              </a:solidFill>
-            </a:endParaRPr>
+            <a:r>
+              <a:rPr sz="3000" b="0" i="0"/>
+              <a:t>BART fine-tuned – full context      0.959   +0.339    0.628</a:t>
+            </a:r>
           </a:p>
           <a:p>
-            <a:pPr lvl="0" algn="l" rtl="0">
-              <a:spcBef>
-                <a:spcPts val="0"/>
-              </a:spcBef>
-              <a:spcAft>
-                <a:spcPts val="0"/>
-              </a:spcAft>
-              <a:buClr>
-                <a:schemeClr val="dk2"/>
-              </a:buClr>
-              <a:buSzPts val="4000"/>
-            </a:pPr>
-            <a:endParaRPr lang="it-IT" sz="4000" dirty="0">
-              <a:solidFill>
-                <a:schemeClr val="dk2"/>
-              </a:solidFill>
-            </a:endParaRPr>
+            <a:r>
+              <a:rPr sz="3000" b="0" i="0"/>
+              <a:t>BART fine-tuned – target only       0.964   +0.342    0.628</a:t>
+            </a:r>
           </a:p>
           <a:p>
-            <a:pPr lvl="0" algn="l" rtl="0">
-              <a:spcBef>
-                <a:spcPts val="0"/>
-              </a:spcBef>
-              <a:spcAft>
-                <a:spcPts val="0"/>
-              </a:spcAft>
-              <a:buClr>
-                <a:schemeClr val="dk2"/>
-              </a:buClr>
-              <a:buSzPts val="4000"/>
-            </a:pPr>
-            <a:endParaRPr lang="it-IT" sz="4000" dirty="0">
-              <a:solidFill>
-                <a:schemeClr val="dk2"/>
-              </a:solidFill>
-            </a:endParaRPr>
+            <a:r>
+              <a:rPr sz="3000" b="0" i="0"/>
+              <a:t>BART + CLIP proxy                   0.879   +0.600    0.639</a:t>
+            </a:r>
           </a:p>
           <a:p>
-            <a:pPr lvl="0" algn="l" rtl="0">
-              <a:spcBef>
-                <a:spcPts val="0"/>
-              </a:spcBef>
-              <a:spcAft>
-                <a:spcPts val="0"/>
-              </a:spcAft>
-              <a:buClr>
-                <a:schemeClr val="dk2"/>
-              </a:buClr>
-              <a:buSzPts val="4000"/>
-            </a:pPr>
             <a:r>
-              <a:rPr lang="it-IT" sz="4000" dirty="0">
-                <a:solidFill>
-                  <a:schemeClr val="dk2"/>
-                </a:solidFill>
-              </a:rPr>
-              <a:t> 				</a:t>
+              <a:rPr sz="3000" b="0" i="0"/>
+              <a:t>DetoxLLM (baseline)                 0.940   +0.443    0.634</a:t>
             </a:r>
-            <a:endParaRPr sz="4000" dirty="0">
-              <a:solidFill>
-                <a:schemeClr val="dk2"/>
-              </a:solidFill>
-            </a:endParaRPr>
+          </a:p>
+          <a:p>
+            <a:r>
+              <a:rPr sz="1600" b="0" i="0"/>
+              <a:t/>
+            </a:r>
+          </a:p>
+          <a:p>
+            <a:r>
+              <a:rPr sz="2800" b="0" i="1"/>
+              <a:t>BART fine-tuned with full context achieves strong detoxification (STA 0.959) while preserving meaning (SIM 0.339). The CLIP-proxy variant trades STA for best semantic fidelity (SIM 0.600), exposing a clear detoxification–fidelity trade-off.</a:t>
+            </a:r>
           </a:p>
         </p:txBody>
       </p:sp>
@@ -7436,6 +7297,17 @@
               <a:r>
                 <a:rPr lang="en-GB" sz="4000" dirty="0"/>
                 <a:t>.</a:t>
+              </a:r>
+            </a:p>
+            <a:p>
+              <a:r>
+                <a:t/>
+              </a:r>
+            </a:p>
+            <a:p>
+              <a:r>
+                <a:rPr sz="3800"/>
+                <a:t>The combined dataset is split 70/15/15 into train/validation/test. Training data fine-tunes the BART student; validation guides early stopping and hyperparameter selection; the test split is used for all reported metrics.</a:t>
               </a:r>
             </a:p>
           </p:txBody>
